--- a/proxy/envoy/EnvoyProxy.pptx
+++ b/proxy/envoy/EnvoyProxy.pptx
@@ -8,15 +8,16 @@
     <p:sldId id="256" r:id="rId2"/>
     <p:sldId id="257" r:id="rId3"/>
     <p:sldId id="259" r:id="rId4"/>
-    <p:sldId id="260" r:id="rId5"/>
-    <p:sldId id="262" r:id="rId6"/>
-    <p:sldId id="258" r:id="rId7"/>
-    <p:sldId id="261" r:id="rId8"/>
-    <p:sldId id="263" r:id="rId9"/>
-    <p:sldId id="264" r:id="rId10"/>
-    <p:sldId id="265" r:id="rId11"/>
-    <p:sldId id="267" r:id="rId12"/>
-    <p:sldId id="266" r:id="rId13"/>
+    <p:sldId id="268" r:id="rId5"/>
+    <p:sldId id="260" r:id="rId6"/>
+    <p:sldId id="262" r:id="rId7"/>
+    <p:sldId id="258" r:id="rId8"/>
+    <p:sldId id="261" r:id="rId9"/>
+    <p:sldId id="263" r:id="rId10"/>
+    <p:sldId id="264" r:id="rId11"/>
+    <p:sldId id="265" r:id="rId12"/>
+    <p:sldId id="267" r:id="rId13"/>
+    <p:sldId id="266" r:id="rId14"/>
   </p:sldIdLst>
   <p:sldSz cx="12192000" cy="6858000"/>
   <p:notesSz cx="6858000" cy="9144000"/>
@@ -353,7 +354,7 @@
             <a:fld id="{B61BEF0D-F0BB-DE4B-95CE-6DB70DBA9567}" type="datetimeFigureOut">
               <a:rPr lang="en-US" dirty="0"/>
               <a:pPr/>
-              <a:t>4/14/2022</a:t>
+              <a:t>4/13/2026</a:t>
             </a:fld>
             <a:endParaRPr lang="en-US" dirty="0"/>
           </a:p>
@@ -684,7 +685,7 @@
             <a:fld id="{B61BEF0D-F0BB-DE4B-95CE-6DB70DBA9567}" type="datetimeFigureOut">
               <a:rPr lang="en-US" dirty="0"/>
               <a:pPr/>
-              <a:t>4/14/2022</a:t>
+              <a:t>4/13/2026</a:t>
             </a:fld>
             <a:endParaRPr lang="en-US" dirty="0"/>
           </a:p>
@@ -959,7 +960,7 @@
             <a:fld id="{B61BEF0D-F0BB-DE4B-95CE-6DB70DBA9567}" type="datetimeFigureOut">
               <a:rPr lang="en-US" dirty="0"/>
               <a:pPr/>
-              <a:t>4/14/2022</a:t>
+              <a:t>4/13/2026</a:t>
             </a:fld>
             <a:endParaRPr lang="en-US" dirty="0"/>
           </a:p>
@@ -1524,7 +1525,7 @@
             <a:fld id="{B61BEF0D-F0BB-DE4B-95CE-6DB70DBA9567}" type="datetimeFigureOut">
               <a:rPr lang="en-US" dirty="0"/>
               <a:pPr/>
-              <a:t>4/14/2022</a:t>
+              <a:t>4/13/2026</a:t>
             </a:fld>
             <a:endParaRPr lang="en-US" dirty="0"/>
           </a:p>
@@ -1799,7 +1800,7 @@
             <a:fld id="{B61BEF0D-F0BB-DE4B-95CE-6DB70DBA9567}" type="datetimeFigureOut">
               <a:rPr lang="en-US" dirty="0"/>
               <a:pPr/>
-              <a:t>4/14/2022</a:t>
+              <a:t>4/13/2026</a:t>
             </a:fld>
             <a:endParaRPr lang="en-US" dirty="0"/>
           </a:p>
@@ -2358,7 +2359,7 @@
             <a:fld id="{B61BEF0D-F0BB-DE4B-95CE-6DB70DBA9567}" type="datetimeFigureOut">
               <a:rPr lang="en-US" dirty="0"/>
               <a:pPr/>
-              <a:t>4/14/2022</a:t>
+              <a:t>4/13/2026</a:t>
             </a:fld>
             <a:endParaRPr lang="en-US" dirty="0"/>
           </a:p>
@@ -2682,7 +2683,7 @@
             <a:fld id="{B61BEF0D-F0BB-DE4B-95CE-6DB70DBA9567}" type="datetimeFigureOut">
               <a:rPr lang="en-US" dirty="0"/>
               <a:pPr/>
-              <a:t>4/14/2022</a:t>
+              <a:t>4/13/2026</a:t>
             </a:fld>
             <a:endParaRPr lang="en-US" dirty="0"/>
           </a:p>
@@ -2856,7 +2857,7 @@
             <a:fld id="{B61BEF0D-F0BB-DE4B-95CE-6DB70DBA9567}" type="datetimeFigureOut">
               <a:rPr lang="en-US" dirty="0"/>
               <a:pPr/>
-              <a:t>4/14/2022</a:t>
+              <a:t>4/13/2026</a:t>
             </a:fld>
             <a:endParaRPr lang="en-US" dirty="0"/>
           </a:p>
@@ -3091,7 +3092,7 @@
             <a:fld id="{B61BEF0D-F0BB-DE4B-95CE-6DB70DBA9567}" type="datetimeFigureOut">
               <a:rPr lang="en-US" dirty="0"/>
               <a:pPr/>
-              <a:t>4/14/2022</a:t>
+              <a:t>4/13/2026</a:t>
             </a:fld>
             <a:endParaRPr lang="en-US" dirty="0"/>
           </a:p>
@@ -3288,7 +3289,7 @@
             <a:fld id="{B61BEF0D-F0BB-DE4B-95CE-6DB70DBA9567}" type="datetimeFigureOut">
               <a:rPr lang="en-US" dirty="0"/>
               <a:pPr/>
-              <a:t>4/14/2022</a:t>
+              <a:t>4/13/2026</a:t>
             </a:fld>
             <a:endParaRPr lang="en-US" dirty="0"/>
           </a:p>
@@ -3561,7 +3562,7 @@
             <a:fld id="{B61BEF0D-F0BB-DE4B-95CE-6DB70DBA9567}" type="datetimeFigureOut">
               <a:rPr lang="en-US" dirty="0"/>
               <a:pPr/>
-              <a:t>4/14/2022</a:t>
+              <a:t>4/13/2026</a:t>
             </a:fld>
             <a:endParaRPr lang="en-US" dirty="0"/>
           </a:p>
@@ -3824,7 +3825,7 @@
             <a:fld id="{B61BEF0D-F0BB-DE4B-95CE-6DB70DBA9567}" type="datetimeFigureOut">
               <a:rPr lang="en-US" dirty="0"/>
               <a:pPr/>
-              <a:t>4/14/2022</a:t>
+              <a:t>4/13/2026</a:t>
             </a:fld>
             <a:endParaRPr lang="en-US" dirty="0"/>
           </a:p>
@@ -4195,7 +4196,7 @@
             <a:fld id="{B61BEF0D-F0BB-DE4B-95CE-6DB70DBA9567}" type="datetimeFigureOut">
               <a:rPr lang="en-US" dirty="0"/>
               <a:pPr/>
-              <a:t>4/14/2022</a:t>
+              <a:t>4/13/2026</a:t>
             </a:fld>
             <a:endParaRPr lang="en-US" dirty="0"/>
           </a:p>
@@ -4340,7 +4341,7 @@
             <a:fld id="{B61BEF0D-F0BB-DE4B-95CE-6DB70DBA9567}" type="datetimeFigureOut">
               <a:rPr lang="en-US" dirty="0"/>
               <a:pPr/>
-              <a:t>4/14/2022</a:t>
+              <a:t>4/13/2026</a:t>
             </a:fld>
             <a:endParaRPr lang="en-US" dirty="0"/>
           </a:p>
@@ -4462,7 +4463,7 @@
             <a:fld id="{B61BEF0D-F0BB-DE4B-95CE-6DB70DBA9567}" type="datetimeFigureOut">
               <a:rPr lang="en-US" dirty="0"/>
               <a:pPr/>
-              <a:t>4/14/2022</a:t>
+              <a:t>4/13/2026</a:t>
             </a:fld>
             <a:endParaRPr lang="en-US" dirty="0"/>
           </a:p>
@@ -4744,7 +4745,7 @@
             <a:fld id="{B61BEF0D-F0BB-DE4B-95CE-6DB70DBA9567}" type="datetimeFigureOut">
               <a:rPr lang="en-US" dirty="0"/>
               <a:pPr/>
-              <a:t>4/14/2022</a:t>
+              <a:t>4/13/2026</a:t>
             </a:fld>
             <a:endParaRPr lang="en-US" dirty="0"/>
           </a:p>
@@ -5065,7 +5066,7 @@
             <a:fld id="{B61BEF0D-F0BB-DE4B-95CE-6DB70DBA9567}" type="datetimeFigureOut">
               <a:rPr lang="en-US" dirty="0"/>
               <a:pPr/>
-              <a:t>4/14/2022</a:t>
+              <a:t>4/13/2026</a:t>
             </a:fld>
             <a:endParaRPr lang="en-US" dirty="0"/>
           </a:p>
@@ -5276,7 +5277,7 @@
             <a:fld id="{B61BEF0D-F0BB-DE4B-95CE-6DB70DBA9567}" type="datetimeFigureOut">
               <a:rPr lang="en-US" dirty="0"/>
               <a:pPr/>
-              <a:t>4/14/2022</a:t>
+              <a:t>4/13/2026</a:t>
             </a:fld>
             <a:endParaRPr lang="en-US" dirty="0"/>
           </a:p>
@@ -5875,10 +5876,10 @@
       </p:grpSpPr>
       <p:sp>
         <p:nvSpPr>
-          <p:cNvPr id="5" name="Title 4">
+          <p:cNvPr id="2" name="Title 1">
             <a:extLst>
               <a:ext uri="{FF2B5EF4-FFF2-40B4-BE49-F238E27FC236}">
-                <a16:creationId xmlns:a16="http://schemas.microsoft.com/office/drawing/2014/main" id="{D02F83A6-5ECA-49E6-8DFA-750219BBBA3B}"/>
+                <a16:creationId xmlns:a16="http://schemas.microsoft.com/office/drawing/2014/main" id="{9AB6FF94-641B-4862-AE32-CA1AD44B51F1}"/>
               </a:ext>
             </a:extLst>
           </p:cNvPr>
@@ -5891,8 +5892,8 @@
         </p:nvSpPr>
         <p:spPr>
           <a:xfrm>
-            <a:off x="685801" y="121641"/>
-            <a:ext cx="10131425" cy="1111542"/>
+            <a:off x="685801" y="247476"/>
+            <a:ext cx="10131425" cy="1077985"/>
           </a:xfrm>
         </p:spPr>
         <p:txBody>
@@ -5902,198 +5903,97 @@
             <a:pPr algn="ctr"/>
             <a:r>
               <a:rPr lang="en-IN" dirty="0"/>
-              <a:t>ENVOY WALKTHROUGH – LAYER 7 PROXY</a:t>
-            </a:r>
-          </a:p>
-        </p:txBody>
-      </p:sp>
-      <p:graphicFrame>
-        <p:nvGraphicFramePr>
-          <p:cNvPr id="6" name="Object 5">
+              <a:t>ENVOY Walkthrough – REVERSE PROXY </a:t>
+            </a:r>
+          </a:p>
+        </p:txBody>
+      </p:sp>
+      <p:pic>
+        <p:nvPicPr>
+          <p:cNvPr id="8" name="Content Placeholder 7" descr="Text&#10;&#10;Description automatically generated">
             <a:extLst>
               <a:ext uri="{FF2B5EF4-FFF2-40B4-BE49-F238E27FC236}">
-                <a16:creationId xmlns:a16="http://schemas.microsoft.com/office/drawing/2014/main" id="{CC341CEA-45C6-4438-A4E3-59788113BE20}"/>
+                <a16:creationId xmlns:a16="http://schemas.microsoft.com/office/drawing/2014/main" id="{76C57575-9B79-42AC-AAE3-7875DB6F3208}"/>
               </a:ext>
             </a:extLst>
           </p:cNvPr>
-          <p:cNvGraphicFramePr>
-            <a:graphicFrameLocks noChangeAspect="1"/>
-          </p:cNvGraphicFramePr>
-          <p:nvPr>
-            <p:extLst>
-              <p:ext uri="{D42A27DB-BD31-4B8C-83A1-F6EECF244321}">
-                <p14:modId xmlns:p14="http://schemas.microsoft.com/office/powerpoint/2010/main" val="3278423374"/>
-              </p:ext>
-            </p:extLst>
-          </p:nvPr>
-        </p:nvGraphicFramePr>
-        <p:xfrm>
-          <a:off x="4576195" y="5104264"/>
-          <a:ext cx="2122415" cy="1111541"/>
-        </p:xfrm>
-        <a:graphic>
-          <a:graphicData uri="http://schemas.openxmlformats.org/presentationml/2006/ole">
-            <mc:AlternateContent xmlns:mc="http://schemas.openxmlformats.org/markup-compatibility/2006">
-              <mc:Choice xmlns:v="urn:schemas-microsoft-com:vml" Requires="v">
-                <p:oleObj spid="_x0000_s1049" name="Packager Shell Object" showAsIcon="1" r:id="rId3" imgW="806760" imgH="459720" progId="Package">
-                  <p:embed/>
-                </p:oleObj>
-              </mc:Choice>
-              <mc:Fallback>
-                <p:oleObj name="Packager Shell Object" showAsIcon="1" r:id="rId3" imgW="806760" imgH="459720" progId="Package">
-                  <p:embed/>
-                  <p:pic>
-                    <p:nvPicPr>
-                      <p:cNvPr id="0" name=""/>
-                      <p:cNvPicPr/>
-                      <p:nvPr/>
-                    </p:nvPicPr>
-                    <p:blipFill>
-                      <a:blip r:embed="rId4"/>
-                      <a:stretch>
-                        <a:fillRect/>
-                      </a:stretch>
-                    </p:blipFill>
-                    <p:spPr>
-                      <a:xfrm>
-                        <a:off x="4576195" y="5104264"/>
-                        <a:ext cx="2122415" cy="1111541"/>
-                      </a:xfrm>
-                      <a:prstGeom prst="rect">
-                        <a:avLst/>
-                      </a:prstGeom>
-                    </p:spPr>
-                  </p:pic>
-                </p:oleObj>
-              </mc:Fallback>
-            </mc:AlternateContent>
-          </a:graphicData>
-        </a:graphic>
-      </p:graphicFrame>
-      <p:sp>
-        <p:nvSpPr>
-          <p:cNvPr id="7" name="TextBox 6">
+          <p:cNvPicPr>
+            <a:picLocks noGrp="1" noChangeAspect="1"/>
+          </p:cNvPicPr>
+          <p:nvPr>
+            <p:ph sz="half" idx="1"/>
+          </p:nvPr>
+        </p:nvPicPr>
+        <p:blipFill>
+          <a:blip r:embed="rId2"/>
+          <a:stretch>
+            <a:fillRect/>
+          </a:stretch>
+        </p:blipFill>
+        <p:spPr>
+          <a:xfrm>
+            <a:off x="685800" y="1379990"/>
+            <a:ext cx="5410200" cy="4982978"/>
+          </a:xfrm>
+        </p:spPr>
+      </p:pic>
+      <p:sp>
+        <p:nvSpPr>
+          <p:cNvPr id="6" name="Content Placeholder 5">
             <a:extLst>
               <a:ext uri="{FF2B5EF4-FFF2-40B4-BE49-F238E27FC236}">
-                <a16:creationId xmlns:a16="http://schemas.microsoft.com/office/drawing/2014/main" id="{054B232C-82D9-418D-882E-2C2A18B7B1DB}"/>
+                <a16:creationId xmlns:a16="http://schemas.microsoft.com/office/drawing/2014/main" id="{2897B982-29EE-4A39-BBED-707182D1C0C9}"/>
               </a:ext>
             </a:extLst>
           </p:cNvPr>
-          <p:cNvSpPr txBox="1"/>
-          <p:nvPr/>
-        </p:nvSpPr>
-        <p:spPr>
-          <a:xfrm>
-            <a:off x="734036" y="1191237"/>
-            <a:ext cx="10083190" cy="3970318"/>
-          </a:xfrm>
-          <a:prstGeom prst="rect">
-            <a:avLst/>
-          </a:prstGeom>
-          <a:noFill/>
-        </p:spPr>
-        <p:txBody>
-          <a:bodyPr wrap="square" rtlCol="0">
-            <a:spAutoFit/>
-          </a:bodyPr>
-          <a:lstStyle/>
-          <a:p>
+          <p:cNvSpPr>
+            <a:spLocks noGrp="1"/>
+          </p:cNvSpPr>
+          <p:nvPr>
+            <p:ph sz="half" idx="2"/>
+          </p:nvPr>
+        </p:nvSpPr>
+        <p:spPr>
+          <a:xfrm>
+            <a:off x="6300132" y="1379991"/>
+            <a:ext cx="4517095" cy="4982977"/>
+          </a:xfrm>
+        </p:spPr>
+        <p:txBody>
+          <a:bodyPr/>
+          <a:lstStyle/>
+          <a:p>
+            <a:pPr marL="0" indent="0">
+              <a:buNone/>
+            </a:pPr>
             <a:r>
               <a:rPr lang="en-IN" dirty="0"/>
-              <a:t>Envoy as a HTTP proxy has somewhat more complex </a:t>
+              <a:t>As can be seen, this is simply a </a:t>
             </a:r>
             <a:r>
               <a:rPr lang="en-IN" dirty="0" err="1"/>
-              <a:t>configuaration</a:t>
+              <a:t>reveral</a:t>
             </a:r>
             <a:r>
               <a:rPr lang="en-IN" dirty="0"/>
-              <a:t> than the previous examples as TCP proxies, as can be seen in the attached </a:t>
-            </a:r>
-            <a:r>
-              <a:rPr lang="en-IN" dirty="0" err="1"/>
-              <a:t>yaml</a:t>
-            </a:r>
+              <a:t> of addresses of the previous example.</a:t>
+            </a:r>
+          </a:p>
+          <a:p>
+            <a:pPr marL="0" indent="0">
+              <a:buNone/>
+            </a:pPr>
             <a:r>
               <a:rPr lang="en-IN" dirty="0"/>
-              <a:t>.</a:t>
-            </a:r>
-          </a:p>
-          <a:p>
-            <a:endParaRPr lang="en-IN" dirty="0"/>
-          </a:p>
-          <a:p>
-            <a:r>
-              <a:rPr lang="en-IN" dirty="0"/>
-              <a:t>Walking though the </a:t>
-            </a:r>
-            <a:r>
-              <a:rPr lang="en-IN" dirty="0" err="1"/>
-              <a:t>yaml</a:t>
-            </a:r>
-            <a:r>
-              <a:rPr lang="en-IN" dirty="0"/>
-              <a:t>, we still have one cluster and one listener, but we now require two filters, </a:t>
-            </a:r>
-          </a:p>
-          <a:p>
-            <a:pPr marL="285750" indent="-285750">
-              <a:buFont typeface="Arial" panose="020B0604020202020204" pitchFamily="34" charset="0"/>
-              <a:buChar char="•"/>
-            </a:pPr>
-            <a:r>
-              <a:rPr lang="en-IN" dirty="0"/>
-              <a:t>http connection manager: https://www.envoyproxy.io/docs/envoy/latest/configuration/http/http_conn_man/http_conn_man</a:t>
-            </a:r>
-          </a:p>
-          <a:p>
-            <a:pPr marL="285750" indent="-285750">
-              <a:buFont typeface="Arial" panose="020B0604020202020204" pitchFamily="34" charset="0"/>
-              <a:buChar char="•"/>
-            </a:pPr>
-            <a:r>
-              <a:rPr lang="en-IN" dirty="0"/>
-              <a:t>http router</a:t>
-            </a:r>
-          </a:p>
-          <a:p>
-            <a:pPr marL="285750" indent="-285750">
-              <a:buFont typeface="Arial" panose="020B0604020202020204" pitchFamily="34" charset="0"/>
-              <a:buChar char="•"/>
-            </a:pPr>
-            <a:endParaRPr lang="en-IN" dirty="0"/>
-          </a:p>
-          <a:p>
-            <a:pPr marL="285750" indent="-285750">
-              <a:buFont typeface="Arial" panose="020B0604020202020204" pitchFamily="34" charset="0"/>
-              <a:buChar char="•"/>
-            </a:pPr>
-            <a:endParaRPr lang="en-IN" dirty="0"/>
-          </a:p>
-          <a:p>
-            <a:r>
-              <a:rPr lang="en-IN" dirty="0"/>
-              <a:t>Here, we have the http connection manager filter, and a configured route table rule to forward all http traffic to cluster_0.</a:t>
-            </a:r>
-          </a:p>
-          <a:p>
-            <a:endParaRPr lang="en-IN" dirty="0"/>
-          </a:p>
-          <a:p>
-            <a:r>
-              <a:rPr lang="en-IN" dirty="0"/>
-              <a:t>The action forwarding is done by the http router filter.</a:t>
-            </a:r>
-          </a:p>
-          <a:p>
-            <a:endParaRPr lang="en-IN" dirty="0"/>
+              <a:t>In the previous example, the cluster had the server, here cluster is the client.</a:t>
+            </a:r>
           </a:p>
         </p:txBody>
       </p:sp>
     </p:spTree>
     <p:extLst>
       <p:ext uri="{BB962C8B-B14F-4D97-AF65-F5344CB8AC3E}">
-        <p14:creationId xmlns:p14="http://schemas.microsoft.com/office/powerpoint/2010/main" val="2170392255"/>
+        <p14:creationId xmlns:p14="http://schemas.microsoft.com/office/powerpoint/2010/main" val="3329079873"/>
       </p:ext>
     </p:extLst>
   </p:cSld>
@@ -6122,6 +6022,253 @@
       </p:grpSpPr>
       <p:sp>
         <p:nvSpPr>
+          <p:cNvPr id="5" name="Title 4">
+            <a:extLst>
+              <a:ext uri="{FF2B5EF4-FFF2-40B4-BE49-F238E27FC236}">
+                <a16:creationId xmlns:a16="http://schemas.microsoft.com/office/drawing/2014/main" id="{D02F83A6-5ECA-49E6-8DFA-750219BBBA3B}"/>
+              </a:ext>
+            </a:extLst>
+          </p:cNvPr>
+          <p:cNvSpPr>
+            <a:spLocks noGrp="1"/>
+          </p:cNvSpPr>
+          <p:nvPr>
+            <p:ph type="title"/>
+          </p:nvPr>
+        </p:nvSpPr>
+        <p:spPr>
+          <a:xfrm>
+            <a:off x="685801" y="121641"/>
+            <a:ext cx="10131425" cy="1111542"/>
+          </a:xfrm>
+        </p:spPr>
+        <p:txBody>
+          <a:bodyPr/>
+          <a:lstStyle/>
+          <a:p>
+            <a:pPr algn="ctr"/>
+            <a:r>
+              <a:rPr lang="en-IN" dirty="0"/>
+              <a:t>ENVOY WALKTHROUGH – LAYER 7 PROXY</a:t>
+            </a:r>
+          </a:p>
+        </p:txBody>
+      </p:sp>
+      <p:graphicFrame>
+        <p:nvGraphicFramePr>
+          <p:cNvPr id="6" name="Object 5">
+            <a:extLst>
+              <a:ext uri="{FF2B5EF4-FFF2-40B4-BE49-F238E27FC236}">
+                <a16:creationId xmlns:a16="http://schemas.microsoft.com/office/drawing/2014/main" id="{CC341CEA-45C6-4438-A4E3-59788113BE20}"/>
+              </a:ext>
+            </a:extLst>
+          </p:cNvPr>
+          <p:cNvGraphicFramePr>
+            <a:graphicFrameLocks noChangeAspect="1"/>
+          </p:cNvGraphicFramePr>
+          <p:nvPr>
+            <p:extLst>
+              <p:ext uri="{D42A27DB-BD31-4B8C-83A1-F6EECF244321}">
+                <p14:modId xmlns:p14="http://schemas.microsoft.com/office/powerpoint/2010/main" val="3278423374"/>
+              </p:ext>
+            </p:extLst>
+          </p:nvPr>
+        </p:nvGraphicFramePr>
+        <p:xfrm>
+          <a:off x="4576195" y="5104264"/>
+          <a:ext cx="2122415" cy="1111541"/>
+        </p:xfrm>
+        <a:graphic>
+          <a:graphicData uri="http://schemas.openxmlformats.org/presentationml/2006/ole">
+            <mc:AlternateContent xmlns:mc="http://schemas.openxmlformats.org/markup-compatibility/2006">
+              <mc:Choice xmlns:v="urn:schemas-microsoft-com:vml" Requires="v">
+                <p:oleObj name="Packager Shell Object" showAsIcon="1" r:id="rId2" imgW="806760" imgH="459720" progId="Package">
+                  <p:embed/>
+                </p:oleObj>
+              </mc:Choice>
+              <mc:Fallback>
+                <p:oleObj name="Packager Shell Object" showAsIcon="1" r:id="rId2" imgW="806760" imgH="459720" progId="Package">
+                  <p:embed/>
+                  <p:pic>
+                    <p:nvPicPr>
+                      <p:cNvPr id="0" name=""/>
+                      <p:cNvPicPr/>
+                      <p:nvPr/>
+                    </p:nvPicPr>
+                    <p:blipFill>
+                      <a:blip r:embed="rId3"/>
+                      <a:stretch>
+                        <a:fillRect/>
+                      </a:stretch>
+                    </p:blipFill>
+                    <p:spPr>
+                      <a:xfrm>
+                        <a:off x="4576195" y="5104264"/>
+                        <a:ext cx="2122415" cy="1111541"/>
+                      </a:xfrm>
+                      <a:prstGeom prst="rect">
+                        <a:avLst/>
+                      </a:prstGeom>
+                    </p:spPr>
+                  </p:pic>
+                </p:oleObj>
+              </mc:Fallback>
+            </mc:AlternateContent>
+          </a:graphicData>
+        </a:graphic>
+      </p:graphicFrame>
+      <p:sp>
+        <p:nvSpPr>
+          <p:cNvPr id="7" name="TextBox 6">
+            <a:extLst>
+              <a:ext uri="{FF2B5EF4-FFF2-40B4-BE49-F238E27FC236}">
+                <a16:creationId xmlns:a16="http://schemas.microsoft.com/office/drawing/2014/main" id="{054B232C-82D9-418D-882E-2C2A18B7B1DB}"/>
+              </a:ext>
+            </a:extLst>
+          </p:cNvPr>
+          <p:cNvSpPr txBox="1"/>
+          <p:nvPr/>
+        </p:nvSpPr>
+        <p:spPr>
+          <a:xfrm>
+            <a:off x="734036" y="1191237"/>
+            <a:ext cx="10083190" cy="3970318"/>
+          </a:xfrm>
+          <a:prstGeom prst="rect">
+            <a:avLst/>
+          </a:prstGeom>
+          <a:noFill/>
+        </p:spPr>
+        <p:txBody>
+          <a:bodyPr wrap="square" rtlCol="0">
+            <a:spAutoFit/>
+          </a:bodyPr>
+          <a:lstStyle/>
+          <a:p>
+            <a:r>
+              <a:rPr lang="en-IN" dirty="0"/>
+              <a:t>Envoy as a HTTP proxy has somewhat more complex </a:t>
+            </a:r>
+            <a:r>
+              <a:rPr lang="en-IN" dirty="0" err="1"/>
+              <a:t>configuaration</a:t>
+            </a:r>
+            <a:r>
+              <a:rPr lang="en-IN" dirty="0"/>
+              <a:t> than the previous examples as TCP proxies, as can be seen in the attached </a:t>
+            </a:r>
+            <a:r>
+              <a:rPr lang="en-IN" dirty="0" err="1"/>
+              <a:t>yaml</a:t>
+            </a:r>
+            <a:r>
+              <a:rPr lang="en-IN" dirty="0"/>
+              <a:t>.</a:t>
+            </a:r>
+          </a:p>
+          <a:p>
+            <a:endParaRPr lang="en-IN" dirty="0"/>
+          </a:p>
+          <a:p>
+            <a:r>
+              <a:rPr lang="en-IN" dirty="0"/>
+              <a:t>Walking though the </a:t>
+            </a:r>
+            <a:r>
+              <a:rPr lang="en-IN" dirty="0" err="1"/>
+              <a:t>yaml</a:t>
+            </a:r>
+            <a:r>
+              <a:rPr lang="en-IN" dirty="0"/>
+              <a:t>, we still have one cluster and one listener, but we now require two filters, </a:t>
+            </a:r>
+          </a:p>
+          <a:p>
+            <a:pPr marL="285750" indent="-285750">
+              <a:buFont typeface="Arial" panose="020B0604020202020204" pitchFamily="34" charset="0"/>
+              <a:buChar char="•"/>
+            </a:pPr>
+            <a:r>
+              <a:rPr lang="en-IN" dirty="0"/>
+              <a:t>http connection manager: https://www.envoyproxy.io/docs/envoy/latest/configuration/http/http_conn_man/http_conn_man</a:t>
+            </a:r>
+          </a:p>
+          <a:p>
+            <a:pPr marL="285750" indent="-285750">
+              <a:buFont typeface="Arial" panose="020B0604020202020204" pitchFamily="34" charset="0"/>
+              <a:buChar char="•"/>
+            </a:pPr>
+            <a:r>
+              <a:rPr lang="en-IN" dirty="0"/>
+              <a:t>http router</a:t>
+            </a:r>
+          </a:p>
+          <a:p>
+            <a:pPr marL="285750" indent="-285750">
+              <a:buFont typeface="Arial" panose="020B0604020202020204" pitchFamily="34" charset="0"/>
+              <a:buChar char="•"/>
+            </a:pPr>
+            <a:endParaRPr lang="en-IN" dirty="0"/>
+          </a:p>
+          <a:p>
+            <a:pPr marL="285750" indent="-285750">
+              <a:buFont typeface="Arial" panose="020B0604020202020204" pitchFamily="34" charset="0"/>
+              <a:buChar char="•"/>
+            </a:pPr>
+            <a:endParaRPr lang="en-IN" dirty="0"/>
+          </a:p>
+          <a:p>
+            <a:r>
+              <a:rPr lang="en-IN" dirty="0"/>
+              <a:t>Here, we have the http connection manager filter, and a configured route table rule to forward all http traffic to cluster_0.</a:t>
+            </a:r>
+          </a:p>
+          <a:p>
+            <a:endParaRPr lang="en-IN" dirty="0"/>
+          </a:p>
+          <a:p>
+            <a:r>
+              <a:rPr lang="en-IN" dirty="0"/>
+              <a:t>The action forwarding is done by the http router filter.</a:t>
+            </a:r>
+          </a:p>
+          <a:p>
+            <a:endParaRPr lang="en-IN" dirty="0"/>
+          </a:p>
+        </p:txBody>
+      </p:sp>
+    </p:spTree>
+    <p:extLst>
+      <p:ext uri="{BB962C8B-B14F-4D97-AF65-F5344CB8AC3E}">
+        <p14:creationId xmlns:p14="http://schemas.microsoft.com/office/powerpoint/2010/main" val="2170392255"/>
+      </p:ext>
+    </p:extLst>
+  </p:cSld>
+  <p:clrMapOvr>
+    <a:masterClrMapping/>
+  </p:clrMapOvr>
+</p:sld>
+</file>
+
+<file path=ppt/slides/slide12.xml><?xml version="1.0" encoding="utf-8"?>
+<p:sld xmlns:a="http://schemas.openxmlformats.org/drawingml/2006/main" xmlns:r="http://schemas.openxmlformats.org/officeDocument/2006/relationships" xmlns:p="http://schemas.openxmlformats.org/presentationml/2006/main">
+  <p:cSld>
+    <p:spTree>
+      <p:nvGrpSpPr>
+        <p:cNvPr id="1" name=""/>
+        <p:cNvGrpSpPr/>
+        <p:nvPr/>
+      </p:nvGrpSpPr>
+      <p:grpSpPr>
+        <a:xfrm>
+          <a:off x="0" y="0"/>
+          <a:ext cx="0" cy="0"/>
+          <a:chOff x="0" y="0"/>
+          <a:chExt cx="0" cy="0"/>
+        </a:xfrm>
+      </p:grpSpPr>
+      <p:sp>
+        <p:nvSpPr>
           <p:cNvPr id="2" name="Title 1">
             <a:extLst>
               <a:ext uri="{FF2B5EF4-FFF2-40B4-BE49-F238E27FC236}">
@@ -6172,7 +6319,7 @@
 </p:sld>
 </file>
 
-<file path=ppt/slides/slide12.xml><?xml version="1.0" encoding="utf-8"?>
+<file path=ppt/slides/slide13.xml><?xml version="1.0" encoding="utf-8"?>
 <p:sld xmlns:a="http://schemas.openxmlformats.org/drawingml/2006/main" xmlns:r="http://schemas.openxmlformats.org/officeDocument/2006/relationships" xmlns:p="http://schemas.openxmlformats.org/presentationml/2006/main">
   <p:cSld>
     <p:spTree>
@@ -6864,6 +7011,257 @@
           <a:chExt cx="0" cy="0"/>
         </a:xfrm>
       </p:grpSpPr>
+      <p:pic>
+        <p:nvPicPr>
+          <p:cNvPr id="12" name="Picture 11">
+            <a:extLst>
+              <a:ext uri="{FF2B5EF4-FFF2-40B4-BE49-F238E27FC236}">
+                <a16:creationId xmlns:a16="http://schemas.microsoft.com/office/drawing/2014/main" id="{A53ED3FC-3BE8-4F1F-BEF1-74B1C721718A}"/>
+              </a:ext>
+              <a:ext uri="{C183D7F6-B498-43B3-948B-1728B52AA6E4}">
+                <adec:decorative xmlns:adec="http://schemas.microsoft.com/office/drawing/2017/decorative" val="1"/>
+              </a:ext>
+            </a:extLst>
+          </p:cNvPr>
+          <p:cNvPicPr>
+            <a:picLocks noGrp="1" noRot="1" noChangeAspect="1" noMove="1" noResize="1" noEditPoints="1" noAdjustHandles="1" noChangeArrowheads="1" noChangeShapeType="1" noCrop="1"/>
+          </p:cNvPicPr>
+          <p:nvPr>
+            <p:extLst>
+              <p:ext uri="{386F3935-93C4-4BCD-93E2-E3B085C9AB24}">
+                <p16:designElem xmlns:p16="http://schemas.microsoft.com/office/powerpoint/2015/main" val="1"/>
+              </p:ext>
+            </p:extLst>
+          </p:nvPr>
+        </p:nvPicPr>
+        <p:blipFill>
+          <a:blip r:embed="rId3">
+            <a:extLst>
+              <a:ext uri="{28A0092B-C50C-407E-A947-70E740481C1C}">
+                <a14:useLocalDpi xmlns:a14="http://schemas.microsoft.com/office/drawing/2010/main" val="0"/>
+              </a:ext>
+            </a:extLst>
+          </a:blip>
+          <a:stretch>
+            <a:fillRect/>
+          </a:stretch>
+        </p:blipFill>
+        <p:spPr>
+          <a:xfrm>
+            <a:off x="0" y="0"/>
+            <a:ext cx="12188825" cy="6856214"/>
+          </a:xfrm>
+          <a:prstGeom prst="rect">
+            <a:avLst/>
+          </a:prstGeom>
+        </p:spPr>
+      </p:pic>
+      <p:sp>
+        <p:nvSpPr>
+          <p:cNvPr id="2" name="Title 1">
+            <a:extLst>
+              <a:ext uri="{FF2B5EF4-FFF2-40B4-BE49-F238E27FC236}">
+                <a16:creationId xmlns:a16="http://schemas.microsoft.com/office/drawing/2014/main" id="{5AEDE8AC-2980-B9F7-9CD0-22F318028BFE}"/>
+              </a:ext>
+            </a:extLst>
+          </p:cNvPr>
+          <p:cNvSpPr>
+            <a:spLocks noGrp="1"/>
+          </p:cNvSpPr>
+          <p:nvPr>
+            <p:ph type="title"/>
+          </p:nvPr>
+        </p:nvSpPr>
+        <p:spPr>
+          <a:xfrm>
+            <a:off x="825909" y="244550"/>
+            <a:ext cx="3979205" cy="1145126"/>
+          </a:xfrm>
+        </p:spPr>
+        <p:txBody>
+          <a:bodyPr vert="horz" lIns="91440" tIns="45720" rIns="91440" bIns="45720" rtlCol="0" anchor="ctr">
+            <a:normAutofit fontScale="90000"/>
+          </a:bodyPr>
+          <a:lstStyle/>
+          <a:p>
+            <a:r>
+              <a:rPr lang="en-US" dirty="0"/>
+              <a:t>Upstream and </a:t>
+            </a:r>
+            <a:r>
+              <a:rPr lang="en-US" dirty="0" err="1"/>
+              <a:t>DOWNstream</a:t>
+            </a:r>
+            <a:endParaRPr lang="en-US" dirty="0"/>
+          </a:p>
+        </p:txBody>
+      </p:sp>
+      <p:sp>
+        <p:nvSpPr>
+          <p:cNvPr id="4" name="Content Placeholder 3">
+            <a:extLst>
+              <a:ext uri="{FF2B5EF4-FFF2-40B4-BE49-F238E27FC236}">
+                <a16:creationId xmlns:a16="http://schemas.microsoft.com/office/drawing/2014/main" id="{2D1D01B9-DEB3-A868-B4C5-960B8794030C}"/>
+              </a:ext>
+            </a:extLst>
+          </p:cNvPr>
+          <p:cNvSpPr>
+            <a:spLocks noGrp="1"/>
+          </p:cNvSpPr>
+          <p:nvPr>
+            <p:ph sz="half" idx="1"/>
+          </p:nvPr>
+        </p:nvSpPr>
+        <p:spPr>
+          <a:xfrm>
+            <a:off x="276447" y="1435396"/>
+            <a:ext cx="5263115" cy="5300330"/>
+          </a:xfrm>
+        </p:spPr>
+        <p:txBody>
+          <a:bodyPr vert="horz" lIns="91440" tIns="45720" rIns="91440" bIns="45720" rtlCol="0" anchor="ctr">
+            <a:normAutofit/>
+          </a:bodyPr>
+          <a:lstStyle/>
+          <a:p>
+            <a:r>
+              <a:rPr lang="en-US" sz="2000" dirty="0"/>
+              <a:t>Consider this picture of a river, Envoy imagines connections and dataflow as a river, with envoy like a Dam in the middle.</a:t>
+            </a:r>
+          </a:p>
+          <a:p>
+            <a:r>
+              <a:rPr lang="en-US" sz="2000" b="1" dirty="0"/>
+              <a:t>Mountain springs</a:t>
+            </a:r>
+            <a:r>
+              <a:rPr lang="en-US" sz="2000" dirty="0"/>
+              <a:t> (upstream) where Services A and B originate — like water sources at high elevation </a:t>
+            </a:r>
+            <a:r>
+              <a:rPr lang="en-US" sz="2000" b="1" dirty="0"/>
+              <a:t>River valley</a:t>
+            </a:r>
+            <a:r>
+              <a:rPr lang="en-US" sz="2000" dirty="0"/>
+              <a:t> (middle) where Envoy Proxy sits like a Dam in the valley, controlling the flow </a:t>
+            </a:r>
+            <a:r>
+              <a:rPr lang="en-US" sz="2000" b="1" dirty="0"/>
+              <a:t>River delta</a:t>
+            </a:r>
+            <a:r>
+              <a:rPr lang="en-US" sz="2000" dirty="0"/>
+              <a:t> (downstream) where the clients receive the water/traffic as it spreads out</a:t>
+            </a:r>
+          </a:p>
+          <a:p>
+            <a:r>
+              <a:rPr lang="en-US" sz="2000" dirty="0"/>
+              <a:t>Hence envoy is server to downstream connections (They receive water from the dam) and client to upstream (water flows to the Dam)</a:t>
+            </a:r>
+          </a:p>
+        </p:txBody>
+      </p:sp>
+      <p:pic>
+        <p:nvPicPr>
+          <p:cNvPr id="7" name="Content Placeholder 6">
+            <a:extLst>
+              <a:ext uri="{FF2B5EF4-FFF2-40B4-BE49-F238E27FC236}">
+                <a16:creationId xmlns:a16="http://schemas.microsoft.com/office/drawing/2014/main" id="{8CCEAAC4-D7A1-8D16-39F6-E50195F3C888}"/>
+              </a:ext>
+            </a:extLst>
+          </p:cNvPr>
+          <p:cNvPicPr>
+            <a:picLocks noGrp="1" noChangeAspect="1"/>
+          </p:cNvPicPr>
+          <p:nvPr>
+            <p:ph sz="half" idx="2"/>
+          </p:nvPr>
+        </p:nvPicPr>
+        <p:blipFill>
+          <a:blip r:embed="rId4"/>
+          <a:stretch>
+            <a:fillRect/>
+          </a:stretch>
+        </p:blipFill>
+        <p:spPr>
+          <a:xfrm>
+            <a:off x="5686397" y="334925"/>
+            <a:ext cx="6714406" cy="6049926"/>
+          </a:xfrm>
+          <a:prstGeom prst="roundRect">
+            <a:avLst>
+              <a:gd name="adj" fmla="val 4380"/>
+            </a:avLst>
+          </a:prstGeom>
+          <a:ln w="50800" cap="sq" cmpd="dbl">
+            <a:gradFill flip="none" rotWithShape="1">
+              <a:gsLst>
+                <a:gs pos="0">
+                  <a:srgbClr val="FFFFFF"/>
+                </a:gs>
+                <a:gs pos="100000">
+                  <a:schemeClr val="tx1">
+                    <a:alpha val="0"/>
+                  </a:schemeClr>
+                </a:gs>
+              </a:gsLst>
+              <a:path path="circle">
+                <a:fillToRect l="50000" t="50000" r="50000" b="50000"/>
+              </a:path>
+              <a:tileRect/>
+            </a:gradFill>
+            <a:miter lim="800000"/>
+          </a:ln>
+          <a:effectLst>
+            <a:outerShdw blurRad="254000" algn="tl" rotWithShape="0">
+              <a:srgbClr val="000000">
+                <a:alpha val="43000"/>
+              </a:srgbClr>
+            </a:outerShdw>
+          </a:effectLst>
+        </p:spPr>
+      </p:pic>
+    </p:spTree>
+    <p:extLst>
+      <p:ext uri="{BB962C8B-B14F-4D97-AF65-F5344CB8AC3E}">
+        <p14:creationId xmlns:p14="http://schemas.microsoft.com/office/powerpoint/2010/main" val="2037688840"/>
+      </p:ext>
+    </p:extLst>
+  </p:cSld>
+  <p:clrMapOvr>
+    <a:masterClrMapping/>
+  </p:clrMapOvr>
+</p:sld>
+</file>
+
+<file path=ppt/slides/slide5.xml><?xml version="1.0" encoding="utf-8"?>
+<p:sld xmlns:a="http://schemas.openxmlformats.org/drawingml/2006/main" xmlns:r="http://schemas.openxmlformats.org/officeDocument/2006/relationships" xmlns:p="http://schemas.openxmlformats.org/presentationml/2006/main">
+  <p:cSld>
+    <p:bg>
+      <p:bgPr>
+        <a:blipFill>
+          <a:blip r:embed="rId2"/>
+          <a:stretch/>
+        </a:blipFill>
+        <a:effectLst/>
+      </p:bgPr>
+    </p:bg>
+    <p:spTree>
+      <p:nvGrpSpPr>
+        <p:cNvPr id="1" name=""/>
+        <p:cNvGrpSpPr/>
+        <p:nvPr/>
+      </p:nvGrpSpPr>
+      <p:grpSpPr>
+        <a:xfrm>
+          <a:off x="0" y="0"/>
+          <a:ext cx="0" cy="0"/>
+          <a:chOff x="0" y="0"/>
+          <a:chExt cx="0" cy="0"/>
+        </a:xfrm>
+      </p:grpSpPr>
       <p:sp>
         <p:nvSpPr>
           <p:cNvPr id="2" name="Title 1">
@@ -7176,158 +7574,6 @@
 </p:sld>
 </file>
 
-<file path=ppt/slides/slide5.xml><?xml version="1.0" encoding="utf-8"?>
-<p:sld xmlns:a="http://schemas.openxmlformats.org/drawingml/2006/main" xmlns:r="http://schemas.openxmlformats.org/officeDocument/2006/relationships" xmlns:p="http://schemas.openxmlformats.org/presentationml/2006/main">
-  <p:cSld>
-    <p:spTree>
-      <p:nvGrpSpPr>
-        <p:cNvPr id="1" name=""/>
-        <p:cNvGrpSpPr/>
-        <p:nvPr/>
-      </p:nvGrpSpPr>
-      <p:grpSpPr>
-        <a:xfrm>
-          <a:off x="0" y="0"/>
-          <a:ext cx="0" cy="0"/>
-          <a:chOff x="0" y="0"/>
-          <a:chExt cx="0" cy="0"/>
-        </a:xfrm>
-      </p:grpSpPr>
-      <p:sp>
-        <p:nvSpPr>
-          <p:cNvPr id="2" name="Title 1">
-            <a:extLst>
-              <a:ext uri="{FF2B5EF4-FFF2-40B4-BE49-F238E27FC236}">
-                <a16:creationId xmlns:a16="http://schemas.microsoft.com/office/drawing/2014/main" id="{B389FEB7-F713-46DD-BC40-0AA0C769CC5E}"/>
-              </a:ext>
-            </a:extLst>
-          </p:cNvPr>
-          <p:cNvSpPr>
-            <a:spLocks noGrp="1"/>
-          </p:cNvSpPr>
-          <p:nvPr>
-            <p:ph type="title"/>
-          </p:nvPr>
-        </p:nvSpPr>
-        <p:spPr>
-          <a:xfrm>
-            <a:off x="685801" y="79696"/>
-            <a:ext cx="10131425" cy="1031845"/>
-          </a:xfrm>
-        </p:spPr>
-        <p:txBody>
-          <a:bodyPr/>
-          <a:lstStyle/>
-          <a:p>
-            <a:pPr algn="ctr"/>
-            <a:r>
-              <a:rPr lang="en-IN" dirty="0"/>
-              <a:t>ENVOY CONFIGURATION</a:t>
-            </a:r>
-          </a:p>
-        </p:txBody>
-      </p:sp>
-      <p:sp>
-        <p:nvSpPr>
-          <p:cNvPr id="4" name="TextBox 3">
-            <a:extLst>
-              <a:ext uri="{FF2B5EF4-FFF2-40B4-BE49-F238E27FC236}">
-                <a16:creationId xmlns:a16="http://schemas.microsoft.com/office/drawing/2014/main" id="{BDEEABEB-45EB-4CB4-8D80-4AFB47C1FA78}"/>
-              </a:ext>
-            </a:extLst>
-          </p:cNvPr>
-          <p:cNvSpPr txBox="1"/>
-          <p:nvPr/>
-        </p:nvSpPr>
-        <p:spPr>
-          <a:xfrm>
-            <a:off x="255864" y="1048624"/>
-            <a:ext cx="11639725" cy="1754326"/>
-          </a:xfrm>
-          <a:prstGeom prst="rect">
-            <a:avLst/>
-          </a:prstGeom>
-          <a:noFill/>
-        </p:spPr>
-        <p:txBody>
-          <a:bodyPr wrap="square" rtlCol="0">
-            <a:spAutoFit/>
-          </a:bodyPr>
-          <a:lstStyle/>
-          <a:p>
-            <a:r>
-              <a:rPr lang="en-IN" dirty="0"/>
-              <a:t>Envoy configuration is generation expressed as </a:t>
-            </a:r>
-            <a:r>
-              <a:rPr lang="en-IN" dirty="0" err="1"/>
-              <a:t>yaml</a:t>
-            </a:r>
-            <a:r>
-              <a:rPr lang="en-IN" dirty="0"/>
-              <a:t> or </a:t>
-            </a:r>
-            <a:r>
-              <a:rPr lang="en-IN" dirty="0" err="1"/>
-              <a:t>json</a:t>
-            </a:r>
-            <a:r>
-              <a:rPr lang="en-IN" dirty="0"/>
-              <a:t>, however, envoy itself defines it’s config is form of </a:t>
-            </a:r>
-            <a:r>
-              <a:rPr lang="en-IN" dirty="0" err="1"/>
-              <a:t>grpc</a:t>
-            </a:r>
-            <a:r>
-              <a:rPr lang="en-IN" dirty="0"/>
-              <a:t> proto files, which are referenced by the documentation, for </a:t>
-            </a:r>
-            <a:r>
-              <a:rPr lang="en-IN" dirty="0" err="1"/>
-              <a:t>eg</a:t>
-            </a:r>
-            <a:r>
-              <a:rPr lang="en-IN" dirty="0"/>
-              <a:t>:</a:t>
-            </a:r>
-          </a:p>
-          <a:p>
-            <a:r>
-              <a:rPr lang="en-IN" dirty="0">
-                <a:hlinkClick r:id="rId2"/>
-              </a:rPr>
-              <a:t>https://www.envoyproxy.io/docs/envoy/latest/api-v3/config/listener/v3/listener.proto</a:t>
-            </a:r>
-            <a:endParaRPr lang="en-IN" dirty="0"/>
-          </a:p>
-          <a:p>
-            <a:endParaRPr lang="en-IN" dirty="0"/>
-          </a:p>
-          <a:p>
-            <a:r>
-              <a:rPr lang="en-IN" dirty="0"/>
-              <a:t>In the coming examples, we will see how this translates to writing envoy configs.</a:t>
-            </a:r>
-          </a:p>
-          <a:p>
-            <a:endParaRPr lang="en-IN" dirty="0"/>
-          </a:p>
-        </p:txBody>
-      </p:sp>
-    </p:spTree>
-    <p:extLst>
-      <p:ext uri="{BB962C8B-B14F-4D97-AF65-F5344CB8AC3E}">
-        <p14:creationId xmlns:p14="http://schemas.microsoft.com/office/powerpoint/2010/main" val="828691785"/>
-      </p:ext>
-    </p:extLst>
-  </p:cSld>
-  <p:clrMapOvr>
-    <a:masterClrMapping/>
-  </p:clrMapOvr>
-</p:sld>
-</file>
-
 <file path=ppt/slides/slide6.xml><?xml version="1.0" encoding="utf-8"?>
 <p:sld xmlns:a="http://schemas.openxmlformats.org/drawingml/2006/main" xmlns:r="http://schemas.openxmlformats.org/officeDocument/2006/relationships" xmlns:p="http://schemas.openxmlformats.org/presentationml/2006/main">
   <p:cSld>
@@ -7350,7 +7596,7 @@
           <p:cNvPr id="2" name="Title 1">
             <a:extLst>
               <a:ext uri="{FF2B5EF4-FFF2-40B4-BE49-F238E27FC236}">
-                <a16:creationId xmlns:a16="http://schemas.microsoft.com/office/drawing/2014/main" id="{CCC44E27-CAAD-4A02-8804-480F3B9FB4F3}"/>
+                <a16:creationId xmlns:a16="http://schemas.microsoft.com/office/drawing/2014/main" id="{B389FEB7-F713-46DD-BC40-0AA0C769CC5E}"/>
               </a:ext>
             </a:extLst>
           </p:cNvPr>
@@ -7363,8 +7609,8 @@
         </p:nvSpPr>
         <p:spPr>
           <a:xfrm>
-            <a:off x="685801" y="125836"/>
-            <a:ext cx="10131425" cy="940963"/>
+            <a:off x="685801" y="79696"/>
+            <a:ext cx="10131425" cy="1031845"/>
           </a:xfrm>
         </p:spPr>
         <p:txBody>
@@ -7374,80 +7620,103 @@
             <a:pPr algn="ctr"/>
             <a:r>
               <a:rPr lang="en-IN" dirty="0"/>
-              <a:t>ENVOY Walkthrough – FRONT proxy</a:t>
-            </a:r>
-          </a:p>
-        </p:txBody>
-      </p:sp>
-      <p:sp>
-        <p:nvSpPr>
-          <p:cNvPr id="4" name="Content Placeholder 3">
+              <a:t>ENVOY CONFIGURATION</a:t>
+            </a:r>
+          </a:p>
+        </p:txBody>
+      </p:sp>
+      <p:sp>
+        <p:nvSpPr>
+          <p:cNvPr id="4" name="TextBox 3">
             <a:extLst>
               <a:ext uri="{FF2B5EF4-FFF2-40B4-BE49-F238E27FC236}">
-                <a16:creationId xmlns:a16="http://schemas.microsoft.com/office/drawing/2014/main" id="{4B3C55F2-F870-4D74-A358-5AF3EBF75561}"/>
+                <a16:creationId xmlns:a16="http://schemas.microsoft.com/office/drawing/2014/main" id="{BDEEABEB-45EB-4CB4-8D80-4AFB47C1FA78}"/>
               </a:ext>
             </a:extLst>
           </p:cNvPr>
-          <p:cNvSpPr>
-            <a:spLocks noGrp="1"/>
-          </p:cNvSpPr>
-          <p:nvPr>
-            <p:ph sz="half" idx="1"/>
-          </p:nvPr>
-        </p:nvSpPr>
-        <p:spPr>
-          <a:xfrm>
-            <a:off x="398478" y="1066799"/>
-            <a:ext cx="10352014" cy="699084"/>
-          </a:xfrm>
-        </p:spPr>
-        <p:txBody>
-          <a:bodyPr/>
-          <a:lstStyle/>
-          <a:p>
-            <a:pPr marL="0" indent="0">
-              <a:buNone/>
-            </a:pPr>
+          <p:cNvSpPr txBox="1"/>
+          <p:nvPr/>
+        </p:nvSpPr>
+        <p:spPr>
+          <a:xfrm>
+            <a:off x="255864" y="1048624"/>
+            <a:ext cx="11639725" cy="1754326"/>
+          </a:xfrm>
+          <a:prstGeom prst="rect">
+            <a:avLst/>
+          </a:prstGeom>
+          <a:noFill/>
+        </p:spPr>
+        <p:txBody>
+          <a:bodyPr wrap="square" rtlCol="0">
+            <a:spAutoFit/>
+          </a:bodyPr>
+          <a:lstStyle/>
+          <a:p>
             <a:r>
               <a:rPr lang="en-IN" dirty="0"/>
-              <a:t>We’ll go though a simple configuration for envoy as a front proxy to understand envoy terminology better</a:t>
-            </a:r>
-          </a:p>
-        </p:txBody>
-      </p:sp>
-      <p:pic>
-        <p:nvPicPr>
-          <p:cNvPr id="7" name="Content Placeholder 6" descr="Text&#10;&#10;Description automatically generated">
-            <a:extLst>
-              <a:ext uri="{FF2B5EF4-FFF2-40B4-BE49-F238E27FC236}">
-                <a16:creationId xmlns:a16="http://schemas.microsoft.com/office/drawing/2014/main" id="{4435E8B2-8649-446B-997A-B1552E1967CF}"/>
-              </a:ext>
-            </a:extLst>
-          </p:cNvPr>
-          <p:cNvPicPr>
-            <a:picLocks noGrp="1" noChangeAspect="1"/>
-          </p:cNvPicPr>
-          <p:nvPr>
-            <p:ph sz="half" idx="2"/>
-          </p:nvPr>
-        </p:nvPicPr>
-        <p:blipFill>
-          <a:blip r:embed="rId2"/>
-          <a:stretch>
-            <a:fillRect/>
-          </a:stretch>
-        </p:blipFill>
-        <p:spPr>
-          <a:xfrm>
-            <a:off x="729843" y="1671754"/>
-            <a:ext cx="9689284" cy="4716462"/>
-          </a:xfrm>
-        </p:spPr>
-      </p:pic>
+              <a:t>Envoy configuration is generation expressed as </a:t>
+            </a:r>
+            <a:r>
+              <a:rPr lang="en-IN" dirty="0" err="1"/>
+              <a:t>yaml</a:t>
+            </a:r>
+            <a:r>
+              <a:rPr lang="en-IN" dirty="0"/>
+              <a:t> or </a:t>
+            </a:r>
+            <a:r>
+              <a:rPr lang="en-IN" dirty="0" err="1"/>
+              <a:t>json</a:t>
+            </a:r>
+            <a:r>
+              <a:rPr lang="en-IN" dirty="0"/>
+              <a:t>, however, envoy itself defines it’s config is form of </a:t>
+            </a:r>
+            <a:r>
+              <a:rPr lang="en-IN" dirty="0" err="1"/>
+              <a:t>grpc</a:t>
+            </a:r>
+            <a:r>
+              <a:rPr lang="en-IN" dirty="0"/>
+              <a:t> proto files, which are referenced by the documentation, for </a:t>
+            </a:r>
+            <a:r>
+              <a:rPr lang="en-IN" dirty="0" err="1"/>
+              <a:t>eg</a:t>
+            </a:r>
+            <a:r>
+              <a:rPr lang="en-IN" dirty="0"/>
+              <a:t>:</a:t>
+            </a:r>
+          </a:p>
+          <a:p>
+            <a:r>
+              <a:rPr lang="en-IN" dirty="0">
+                <a:hlinkClick r:id="rId2"/>
+              </a:rPr>
+              <a:t>https://www.envoyproxy.io/docs/envoy/latest/api-v3/config/listener/v3/listener.proto</a:t>
+            </a:r>
+            <a:endParaRPr lang="en-IN" dirty="0"/>
+          </a:p>
+          <a:p>
+            <a:endParaRPr lang="en-IN" dirty="0"/>
+          </a:p>
+          <a:p>
+            <a:r>
+              <a:rPr lang="en-IN" dirty="0"/>
+              <a:t>In the coming examples, we will see how this translates to writing envoy configs.</a:t>
+            </a:r>
+          </a:p>
+          <a:p>
+            <a:endParaRPr lang="en-IN" dirty="0"/>
+          </a:p>
+        </p:txBody>
+      </p:sp>
     </p:spTree>
     <p:extLst>
       <p:ext uri="{BB962C8B-B14F-4D97-AF65-F5344CB8AC3E}">
-        <p14:creationId xmlns:p14="http://schemas.microsoft.com/office/powerpoint/2010/main" val="674438738"/>
+        <p14:creationId xmlns:p14="http://schemas.microsoft.com/office/powerpoint/2010/main" val="828691785"/>
       </p:ext>
     </p:extLst>
   </p:cSld>
@@ -7476,179 +7745,107 @@
       </p:grpSpPr>
       <p:sp>
         <p:nvSpPr>
-          <p:cNvPr id="7" name="TextBox 6">
+          <p:cNvPr id="2" name="Title 1">
             <a:extLst>
               <a:ext uri="{FF2B5EF4-FFF2-40B4-BE49-F238E27FC236}">
-                <a16:creationId xmlns:a16="http://schemas.microsoft.com/office/drawing/2014/main" id="{40EAF5BA-9DCB-4F63-AE5F-1EA8A008083B}"/>
+                <a16:creationId xmlns:a16="http://schemas.microsoft.com/office/drawing/2014/main" id="{CCC44E27-CAAD-4A02-8804-480F3B9FB4F3}"/>
               </a:ext>
             </a:extLst>
           </p:cNvPr>
-          <p:cNvSpPr txBox="1"/>
-          <p:nvPr/>
-        </p:nvSpPr>
-        <p:spPr>
-          <a:xfrm>
-            <a:off x="499146" y="402672"/>
-            <a:ext cx="10863742" cy="6186309"/>
-          </a:xfrm>
-          <a:prstGeom prst="rect">
-            <a:avLst/>
-          </a:prstGeom>
-          <a:noFill/>
-        </p:spPr>
-        <p:txBody>
-          <a:bodyPr wrap="square" rtlCol="0">
-            <a:spAutoFit/>
-          </a:bodyPr>
-          <a:lstStyle/>
-          <a:p>
+          <p:cNvSpPr>
+            <a:spLocks noGrp="1"/>
+          </p:cNvSpPr>
+          <p:nvPr>
+            <p:ph type="title"/>
+          </p:nvPr>
+        </p:nvSpPr>
+        <p:spPr>
+          <a:xfrm>
+            <a:off x="685801" y="125836"/>
+            <a:ext cx="10131425" cy="940963"/>
+          </a:xfrm>
+        </p:spPr>
+        <p:txBody>
+          <a:bodyPr/>
+          <a:lstStyle/>
+          <a:p>
+            <a:pPr algn="ctr"/>
             <a:r>
               <a:rPr lang="en-IN" dirty="0"/>
-              <a:t>In this config, we have one listener and one cluster. Lets go through some terminology – </a:t>
-            </a:r>
-          </a:p>
-          <a:p>
-            <a:endParaRPr lang="en-IN" dirty="0"/>
-          </a:p>
-          <a:p>
+              <a:t>ENVOY Walkthrough – FRONT proxy</a:t>
+            </a:r>
+          </a:p>
+        </p:txBody>
+      </p:sp>
+      <p:sp>
+        <p:nvSpPr>
+          <p:cNvPr id="4" name="Content Placeholder 3">
+            <a:extLst>
+              <a:ext uri="{FF2B5EF4-FFF2-40B4-BE49-F238E27FC236}">
+                <a16:creationId xmlns:a16="http://schemas.microsoft.com/office/drawing/2014/main" id="{4B3C55F2-F870-4D74-A358-5AF3EBF75561}"/>
+              </a:ext>
+            </a:extLst>
+          </p:cNvPr>
+          <p:cNvSpPr>
+            <a:spLocks noGrp="1"/>
+          </p:cNvSpPr>
+          <p:nvPr>
+            <p:ph sz="half" idx="1"/>
+          </p:nvPr>
+        </p:nvSpPr>
+        <p:spPr>
+          <a:xfrm>
+            <a:off x="398478" y="1066799"/>
+            <a:ext cx="10352014" cy="699084"/>
+          </a:xfrm>
+        </p:spPr>
+        <p:txBody>
+          <a:bodyPr/>
+          <a:lstStyle/>
+          <a:p>
+            <a:pPr marL="0" indent="0">
+              <a:buNone/>
+            </a:pPr>
             <a:r>
               <a:rPr lang="en-IN" dirty="0"/>
-              <a:t>Anything in front of envoy is </a:t>
-            </a:r>
-            <a:r>
-              <a:rPr lang="en-IN" b="1" dirty="0"/>
-              <a:t>upstream</a:t>
-            </a:r>
-            <a:r>
-              <a:rPr lang="en-IN" dirty="0"/>
-              <a:t>, anything behind envoy is </a:t>
-            </a:r>
-            <a:r>
-              <a:rPr lang="en-IN" b="1" dirty="0"/>
-              <a:t>downstream</a:t>
-            </a:r>
-            <a:r>
-              <a:rPr lang="en-IN" dirty="0"/>
-              <a:t>. Requests come from Downstream, responses go upstream.</a:t>
-            </a:r>
-          </a:p>
-          <a:p>
-            <a:endParaRPr lang="en-IN" dirty="0"/>
-          </a:p>
-          <a:p>
-            <a:r>
-              <a:rPr lang="en-IN" dirty="0"/>
-              <a:t>A group of endpoints is called a </a:t>
-            </a:r>
-            <a:r>
-              <a:rPr lang="en-IN" b="1" dirty="0"/>
-              <a:t>cluster. </a:t>
-            </a:r>
-            <a:r>
-              <a:rPr lang="en-IN" dirty="0"/>
-              <a:t>Each cluster has load balancing baked in.</a:t>
-            </a:r>
-          </a:p>
-          <a:p>
-            <a:endParaRPr lang="en-IN" b="1" dirty="0"/>
-          </a:p>
-          <a:p>
-            <a:r>
-              <a:rPr lang="en-IN" b="1" dirty="0"/>
-              <a:t>Listeners </a:t>
-            </a:r>
-            <a:r>
-              <a:rPr lang="en-IN" dirty="0"/>
-              <a:t>listen to downstream clients. Filters are applied to listeners. </a:t>
-            </a:r>
-            <a:endParaRPr lang="en-IN" b="1" dirty="0"/>
-          </a:p>
-          <a:p>
-            <a:endParaRPr lang="en-IN" b="1" dirty="0"/>
-          </a:p>
-          <a:p>
-            <a:endParaRPr lang="en-IN" b="1" dirty="0"/>
-          </a:p>
-          <a:p>
-            <a:r>
-              <a:rPr lang="en-IN" dirty="0"/>
-              <a:t>Envoy listener doc: </a:t>
-            </a:r>
-            <a:r>
-              <a:rPr lang="en-IN" dirty="0">
-                <a:hlinkClick r:id="rId2"/>
-              </a:rPr>
-              <a:t>https://www.envoyproxy.io/docs/envoy/latest/intro/arch_overview/listeners/listeners</a:t>
-            </a:r>
-            <a:endParaRPr lang="en-IN" dirty="0"/>
-          </a:p>
-          <a:p>
-            <a:endParaRPr lang="en-IN" dirty="0"/>
-          </a:p>
-          <a:p>
-            <a:r>
-              <a:rPr lang="en-IN" dirty="0"/>
-              <a:t>So, here the listener is bound to IP_ADDR_ANY:10000, and has a </a:t>
-            </a:r>
-            <a:r>
-              <a:rPr lang="en-IN" dirty="0" err="1"/>
-              <a:t>tcp</a:t>
-            </a:r>
-            <a:r>
-              <a:rPr lang="en-IN" dirty="0"/>
-              <a:t> filter which points at cluster_0, which has address localhost:1447. Hence we expect that any connection to any </a:t>
-            </a:r>
-            <a:r>
-              <a:rPr lang="en-IN" dirty="0" err="1"/>
-              <a:t>ip</a:t>
-            </a:r>
-            <a:r>
-              <a:rPr lang="en-IN" dirty="0"/>
-              <a:t> with port 10000 will be redirected to application at localhost:1447.</a:t>
-            </a:r>
-          </a:p>
-          <a:p>
-            <a:endParaRPr lang="en-IN" dirty="0"/>
-          </a:p>
-          <a:p>
-            <a:r>
-              <a:rPr lang="en-IN" dirty="0"/>
-              <a:t>The actual functionality of this is mostly in the filter configured, </a:t>
-            </a:r>
-            <a:r>
-              <a:rPr lang="en-IN" dirty="0" err="1"/>
-              <a:t>tcp_proxy</a:t>
-            </a:r>
-            <a:r>
-              <a:rPr lang="en-IN" dirty="0"/>
-              <a:t>: </a:t>
-            </a:r>
-            <a:r>
-              <a:rPr lang="en-IN" dirty="0">
-                <a:hlinkClick r:id="rId3"/>
-              </a:rPr>
-              <a:t>https://www.envoyproxy.io/docs/envoy/latest/intro/arch_overview/listeners/tcp_proxy#arch-overview-tcp-proxy</a:t>
-            </a:r>
-            <a:endParaRPr lang="en-IN" dirty="0"/>
-          </a:p>
-          <a:p>
-            <a:endParaRPr lang="en-IN" dirty="0"/>
-          </a:p>
-          <a:p>
-            <a:endParaRPr lang="en-IN" dirty="0"/>
-          </a:p>
-          <a:p>
-            <a:endParaRPr lang="en-IN" dirty="0"/>
-          </a:p>
-          <a:p>
-            <a:endParaRPr lang="en-IN" dirty="0"/>
-          </a:p>
-        </p:txBody>
-      </p:sp>
+              <a:t>We’ll go though a simple configuration for envoy as a front proxy to understand envoy terminology better</a:t>
+            </a:r>
+          </a:p>
+        </p:txBody>
+      </p:sp>
+      <p:pic>
+        <p:nvPicPr>
+          <p:cNvPr id="7" name="Content Placeholder 6" descr="Text&#10;&#10;Description automatically generated">
+            <a:extLst>
+              <a:ext uri="{FF2B5EF4-FFF2-40B4-BE49-F238E27FC236}">
+                <a16:creationId xmlns:a16="http://schemas.microsoft.com/office/drawing/2014/main" id="{4435E8B2-8649-446B-997A-B1552E1967CF}"/>
+              </a:ext>
+            </a:extLst>
+          </p:cNvPr>
+          <p:cNvPicPr>
+            <a:picLocks noGrp="1" noChangeAspect="1"/>
+          </p:cNvPicPr>
+          <p:nvPr>
+            <p:ph sz="half" idx="2"/>
+          </p:nvPr>
+        </p:nvPicPr>
+        <p:blipFill>
+          <a:blip r:embed="rId2"/>
+          <a:stretch>
+            <a:fillRect/>
+          </a:stretch>
+        </p:blipFill>
+        <p:spPr>
+          <a:xfrm>
+            <a:off x="729843" y="1671754"/>
+            <a:ext cx="9689284" cy="4716462"/>
+          </a:xfrm>
+        </p:spPr>
+      </p:pic>
     </p:spTree>
     <p:extLst>
       <p:ext uri="{BB962C8B-B14F-4D97-AF65-F5344CB8AC3E}">
-        <p14:creationId xmlns:p14="http://schemas.microsoft.com/office/powerpoint/2010/main" val="1045774584"/>
+        <p14:creationId xmlns:p14="http://schemas.microsoft.com/office/powerpoint/2010/main" val="674438738"/>
       </p:ext>
     </p:extLst>
   </p:cSld>
@@ -7677,44 +7874,10 @@
       </p:grpSpPr>
       <p:sp>
         <p:nvSpPr>
-          <p:cNvPr id="2" name="Title 1">
+          <p:cNvPr id="7" name="TextBox 6">
             <a:extLst>
               <a:ext uri="{FF2B5EF4-FFF2-40B4-BE49-F238E27FC236}">
-                <a16:creationId xmlns:a16="http://schemas.microsoft.com/office/drawing/2014/main" id="{99CC22F4-5352-4A8B-AD35-250905FB8A8E}"/>
-              </a:ext>
-            </a:extLst>
-          </p:cNvPr>
-          <p:cNvSpPr>
-            <a:spLocks noGrp="1"/>
-          </p:cNvSpPr>
-          <p:nvPr>
-            <p:ph type="title"/>
-          </p:nvPr>
-        </p:nvSpPr>
-        <p:spPr>
-          <a:xfrm>
-            <a:off x="685801" y="96474"/>
-            <a:ext cx="10131425" cy="1010873"/>
-          </a:xfrm>
-        </p:spPr>
-        <p:txBody>
-          <a:bodyPr/>
-          <a:lstStyle/>
-          <a:p>
-            <a:pPr algn="ctr"/>
-            <a:r>
-              <a:rPr lang="en-IN" dirty="0"/>
-              <a:t>ENVOY FILTERS</a:t>
-            </a:r>
-          </a:p>
-        </p:txBody>
-      </p:sp>
-      <p:sp>
-        <p:nvSpPr>
-          <p:cNvPr id="3" name="TextBox 2">
-            <a:extLst>
-              <a:ext uri="{FF2B5EF4-FFF2-40B4-BE49-F238E27FC236}">
-                <a16:creationId xmlns:a16="http://schemas.microsoft.com/office/drawing/2014/main" id="{BE5F8248-3A96-4223-8884-81A29FD65D08}"/>
+                <a16:creationId xmlns:a16="http://schemas.microsoft.com/office/drawing/2014/main" id="{40EAF5BA-9DCB-4F63-AE5F-1EA8A008083B}"/>
               </a:ext>
             </a:extLst>
           </p:cNvPr>
@@ -7723,8 +7886,8 @@
         </p:nvSpPr>
         <p:spPr>
           <a:xfrm>
-            <a:off x="524312" y="1279321"/>
-            <a:ext cx="10796631" cy="646331"/>
+            <a:off x="499146" y="402672"/>
+            <a:ext cx="10863742" cy="6186309"/>
           </a:xfrm>
           <a:prstGeom prst="rect">
             <a:avLst/>
@@ -7739,45 +7902,151 @@
           <a:p>
             <a:r>
               <a:rPr lang="en-IN" dirty="0"/>
-              <a:t>Filters are how envoy maps listeners and clusters, and performs operations on dataflow. Filters can be chained together to form more complex logic.</a:t>
-            </a:r>
-          </a:p>
-        </p:txBody>
-      </p:sp>
-      <p:pic>
-        <p:nvPicPr>
-          <p:cNvPr id="5" name="Picture 4" descr="Diagram&#10;&#10;Description automatically generated">
-            <a:extLst>
-              <a:ext uri="{FF2B5EF4-FFF2-40B4-BE49-F238E27FC236}">
-                <a16:creationId xmlns:a16="http://schemas.microsoft.com/office/drawing/2014/main" id="{4A717E2F-4524-4FD5-A712-DFA241057758}"/>
-              </a:ext>
-            </a:extLst>
-          </p:cNvPr>
-          <p:cNvPicPr>
-            <a:picLocks noChangeAspect="1"/>
-          </p:cNvPicPr>
-          <p:nvPr/>
-        </p:nvPicPr>
-        <p:blipFill>
-          <a:blip r:embed="rId2"/>
-          <a:stretch>
-            <a:fillRect/>
-          </a:stretch>
-        </p:blipFill>
-        <p:spPr>
-          <a:xfrm>
-            <a:off x="2322337" y="2833704"/>
-            <a:ext cx="6858352" cy="1635209"/>
-          </a:xfrm>
-          <a:prstGeom prst="rect">
-            <a:avLst/>
-          </a:prstGeom>
-        </p:spPr>
-      </p:pic>
+              <a:t>In this config, we have one listener and one cluster. Lets go through some terminology – </a:t>
+            </a:r>
+          </a:p>
+          <a:p>
+            <a:endParaRPr lang="en-IN" dirty="0"/>
+          </a:p>
+          <a:p>
+            <a:r>
+              <a:rPr lang="en-IN" dirty="0"/>
+              <a:t>Anything in front of envoy is </a:t>
+            </a:r>
+            <a:r>
+              <a:rPr lang="en-IN" b="1" dirty="0"/>
+              <a:t>upstream</a:t>
+            </a:r>
+            <a:r>
+              <a:rPr lang="en-IN" dirty="0"/>
+              <a:t>, anything behind envoy is </a:t>
+            </a:r>
+            <a:r>
+              <a:rPr lang="en-IN" b="1" dirty="0"/>
+              <a:t>downstream</a:t>
+            </a:r>
+            <a:r>
+              <a:rPr lang="en-IN" dirty="0"/>
+              <a:t>. Requests come from Downstream, responses go upstream.</a:t>
+            </a:r>
+          </a:p>
+          <a:p>
+            <a:endParaRPr lang="en-IN" dirty="0"/>
+          </a:p>
+          <a:p>
+            <a:r>
+              <a:rPr lang="en-IN" dirty="0"/>
+              <a:t>A group of endpoints is called a </a:t>
+            </a:r>
+            <a:r>
+              <a:rPr lang="en-IN" b="1" dirty="0"/>
+              <a:t>cluster. </a:t>
+            </a:r>
+            <a:r>
+              <a:rPr lang="en-IN" dirty="0"/>
+              <a:t>Each cluster has load balancing baked in.</a:t>
+            </a:r>
+          </a:p>
+          <a:p>
+            <a:endParaRPr lang="en-IN" b="1" dirty="0"/>
+          </a:p>
+          <a:p>
+            <a:r>
+              <a:rPr lang="en-IN" b="1" dirty="0"/>
+              <a:t>Listeners </a:t>
+            </a:r>
+            <a:r>
+              <a:rPr lang="en-IN" dirty="0"/>
+              <a:t>listen to downstream clients. Filters are applied to listeners. </a:t>
+            </a:r>
+            <a:endParaRPr lang="en-IN" b="1" dirty="0"/>
+          </a:p>
+          <a:p>
+            <a:endParaRPr lang="en-IN" b="1" dirty="0"/>
+          </a:p>
+          <a:p>
+            <a:endParaRPr lang="en-IN" b="1" dirty="0"/>
+          </a:p>
+          <a:p>
+            <a:r>
+              <a:rPr lang="en-IN" dirty="0"/>
+              <a:t>Envoy listener doc: </a:t>
+            </a:r>
+            <a:r>
+              <a:rPr lang="en-IN" dirty="0">
+                <a:hlinkClick r:id="rId2"/>
+              </a:rPr>
+              <a:t>https://www.envoyproxy.io/docs/envoy/latest/intro/arch_overview/listeners/listeners</a:t>
+            </a:r>
+            <a:endParaRPr lang="en-IN" dirty="0"/>
+          </a:p>
+          <a:p>
+            <a:endParaRPr lang="en-IN" dirty="0"/>
+          </a:p>
+          <a:p>
+            <a:r>
+              <a:rPr lang="en-IN" dirty="0"/>
+              <a:t>So, here the listener is bound to IP_ADDR_ANY:10000, and has a </a:t>
+            </a:r>
+            <a:r>
+              <a:rPr lang="en-IN" dirty="0" err="1"/>
+              <a:t>tcp</a:t>
+            </a:r>
+            <a:r>
+              <a:rPr lang="en-IN" dirty="0"/>
+              <a:t> filter which points at cluster_0, which has address localhost:1447. Hence we expect that any connection to any </a:t>
+            </a:r>
+            <a:r>
+              <a:rPr lang="en-IN" dirty="0" err="1"/>
+              <a:t>ip</a:t>
+            </a:r>
+            <a:r>
+              <a:rPr lang="en-IN" dirty="0"/>
+              <a:t> with port 10000 will be redirected to application at localhost:1447.</a:t>
+            </a:r>
+          </a:p>
+          <a:p>
+            <a:endParaRPr lang="en-IN" dirty="0"/>
+          </a:p>
+          <a:p>
+            <a:r>
+              <a:rPr lang="en-IN" dirty="0"/>
+              <a:t>The actual functionality of this is mostly in the filter configured, </a:t>
+            </a:r>
+            <a:r>
+              <a:rPr lang="en-IN" dirty="0" err="1"/>
+              <a:t>tcp_proxy</a:t>
+            </a:r>
+            <a:r>
+              <a:rPr lang="en-IN" dirty="0"/>
+              <a:t>: </a:t>
+            </a:r>
+            <a:r>
+              <a:rPr lang="en-IN" dirty="0">
+                <a:hlinkClick r:id="rId3"/>
+              </a:rPr>
+              <a:t>https://www.envoyproxy.io/docs/envoy/latest/intro/arch_overview/listeners/tcp_proxy#arch-overview-tcp-proxy</a:t>
+            </a:r>
+            <a:endParaRPr lang="en-IN" dirty="0"/>
+          </a:p>
+          <a:p>
+            <a:endParaRPr lang="en-IN" dirty="0"/>
+          </a:p>
+          <a:p>
+            <a:endParaRPr lang="en-IN" dirty="0"/>
+          </a:p>
+          <a:p>
+            <a:endParaRPr lang="en-IN" dirty="0"/>
+          </a:p>
+          <a:p>
+            <a:endParaRPr lang="en-IN" dirty="0"/>
+          </a:p>
+        </p:txBody>
+      </p:sp>
     </p:spTree>
     <p:extLst>
       <p:ext uri="{BB962C8B-B14F-4D97-AF65-F5344CB8AC3E}">
-        <p14:creationId xmlns:p14="http://schemas.microsoft.com/office/powerpoint/2010/main" val="1792498467"/>
+        <p14:creationId xmlns:p14="http://schemas.microsoft.com/office/powerpoint/2010/main" val="1045774584"/>
       </p:ext>
     </p:extLst>
   </p:cSld>
@@ -7809,7 +8078,7 @@
           <p:cNvPr id="2" name="Title 1">
             <a:extLst>
               <a:ext uri="{FF2B5EF4-FFF2-40B4-BE49-F238E27FC236}">
-                <a16:creationId xmlns:a16="http://schemas.microsoft.com/office/drawing/2014/main" id="{9AB6FF94-641B-4862-AE32-CA1AD44B51F1}"/>
+                <a16:creationId xmlns:a16="http://schemas.microsoft.com/office/drawing/2014/main" id="{99CC22F4-5352-4A8B-AD35-250905FB8A8E}"/>
               </a:ext>
             </a:extLst>
           </p:cNvPr>
@@ -7822,8 +8091,8 @@
         </p:nvSpPr>
         <p:spPr>
           <a:xfrm>
-            <a:off x="685801" y="247476"/>
-            <a:ext cx="10131425" cy="1077985"/>
+            <a:off x="685801" y="96474"/>
+            <a:ext cx="10131425" cy="1010873"/>
           </a:xfrm>
         </p:spPr>
         <p:txBody>
@@ -7833,26 +8102,59 @@
             <a:pPr algn="ctr"/>
             <a:r>
               <a:rPr lang="en-IN" dirty="0"/>
-              <a:t>ENVOY Walkthrough – REVERSE PROXY </a:t>
+              <a:t>ENVOY FILTERS</a:t>
+            </a:r>
+          </a:p>
+        </p:txBody>
+      </p:sp>
+      <p:sp>
+        <p:nvSpPr>
+          <p:cNvPr id="3" name="TextBox 2">
+            <a:extLst>
+              <a:ext uri="{FF2B5EF4-FFF2-40B4-BE49-F238E27FC236}">
+                <a16:creationId xmlns:a16="http://schemas.microsoft.com/office/drawing/2014/main" id="{BE5F8248-3A96-4223-8884-81A29FD65D08}"/>
+              </a:ext>
+            </a:extLst>
+          </p:cNvPr>
+          <p:cNvSpPr txBox="1"/>
+          <p:nvPr/>
+        </p:nvSpPr>
+        <p:spPr>
+          <a:xfrm>
+            <a:off x="524312" y="1279321"/>
+            <a:ext cx="10796631" cy="646331"/>
+          </a:xfrm>
+          <a:prstGeom prst="rect">
+            <a:avLst/>
+          </a:prstGeom>
+          <a:noFill/>
+        </p:spPr>
+        <p:txBody>
+          <a:bodyPr wrap="square" rtlCol="0">
+            <a:spAutoFit/>
+          </a:bodyPr>
+          <a:lstStyle/>
+          <a:p>
+            <a:r>
+              <a:rPr lang="en-IN" dirty="0"/>
+              <a:t>Filters are how envoy maps listeners and clusters, and performs operations on dataflow. Filters can be chained together to form more complex logic.</a:t>
             </a:r>
           </a:p>
         </p:txBody>
       </p:sp>
       <p:pic>
         <p:nvPicPr>
-          <p:cNvPr id="8" name="Content Placeholder 7" descr="Text&#10;&#10;Description automatically generated">
+          <p:cNvPr id="5" name="Picture 4" descr="Diagram&#10;&#10;Description automatically generated">
             <a:extLst>
               <a:ext uri="{FF2B5EF4-FFF2-40B4-BE49-F238E27FC236}">
-                <a16:creationId xmlns:a16="http://schemas.microsoft.com/office/drawing/2014/main" id="{76C57575-9B79-42AC-AAE3-7875DB6F3208}"/>
+                <a16:creationId xmlns:a16="http://schemas.microsoft.com/office/drawing/2014/main" id="{4A717E2F-4524-4FD5-A712-DFA241057758}"/>
               </a:ext>
             </a:extLst>
           </p:cNvPr>
           <p:cNvPicPr>
-            <a:picLocks noGrp="1" noChangeAspect="1"/>
+            <a:picLocks noChangeAspect="1"/>
           </p:cNvPicPr>
-          <p:nvPr>
-            <p:ph sz="half" idx="1"/>
-          </p:nvPr>
+          <p:nvPr/>
         </p:nvPicPr>
         <p:blipFill>
           <a:blip r:embed="rId2"/>
@@ -7862,68 +8164,18 @@
         </p:blipFill>
         <p:spPr>
           <a:xfrm>
-            <a:off x="685800" y="1379990"/>
-            <a:ext cx="5410200" cy="4982978"/>
-          </a:xfrm>
+            <a:off x="2322337" y="2833704"/>
+            <a:ext cx="6858352" cy="1635209"/>
+          </a:xfrm>
+          <a:prstGeom prst="rect">
+            <a:avLst/>
+          </a:prstGeom>
         </p:spPr>
       </p:pic>
-      <p:sp>
-        <p:nvSpPr>
-          <p:cNvPr id="6" name="Content Placeholder 5">
-            <a:extLst>
-              <a:ext uri="{FF2B5EF4-FFF2-40B4-BE49-F238E27FC236}">
-                <a16:creationId xmlns:a16="http://schemas.microsoft.com/office/drawing/2014/main" id="{2897B982-29EE-4A39-BBED-707182D1C0C9}"/>
-              </a:ext>
-            </a:extLst>
-          </p:cNvPr>
-          <p:cNvSpPr>
-            <a:spLocks noGrp="1"/>
-          </p:cNvSpPr>
-          <p:nvPr>
-            <p:ph sz="half" idx="2"/>
-          </p:nvPr>
-        </p:nvSpPr>
-        <p:spPr>
-          <a:xfrm>
-            <a:off x="6300132" y="1379991"/>
-            <a:ext cx="4517095" cy="4982977"/>
-          </a:xfrm>
-        </p:spPr>
-        <p:txBody>
-          <a:bodyPr/>
-          <a:lstStyle/>
-          <a:p>
-            <a:pPr marL="0" indent="0">
-              <a:buNone/>
-            </a:pPr>
-            <a:r>
-              <a:rPr lang="en-IN" dirty="0"/>
-              <a:t>As can be seen, this is simply a </a:t>
-            </a:r>
-            <a:r>
-              <a:rPr lang="en-IN" dirty="0" err="1"/>
-              <a:t>reveral</a:t>
-            </a:r>
-            <a:r>
-              <a:rPr lang="en-IN" dirty="0"/>
-              <a:t> of addresses of the previous example.</a:t>
-            </a:r>
-          </a:p>
-          <a:p>
-            <a:pPr marL="0" indent="0">
-              <a:buNone/>
-            </a:pPr>
-            <a:r>
-              <a:rPr lang="en-IN" dirty="0"/>
-              <a:t>In the previous example, the cluster had the server, here cluster is the client.</a:t>
-            </a:r>
-          </a:p>
-        </p:txBody>
-      </p:sp>
     </p:spTree>
     <p:extLst>
       <p:ext uri="{BB962C8B-B14F-4D97-AF65-F5344CB8AC3E}">
-        <p14:creationId xmlns:p14="http://schemas.microsoft.com/office/powerpoint/2010/main" val="3329079873"/>
+        <p14:creationId xmlns:p14="http://schemas.microsoft.com/office/powerpoint/2010/main" val="1792498467"/>
       </p:ext>
     </p:extLst>
   </p:cSld>
